--- a/visualisation/workflow.pptx
+++ b/visualisation/workflow.pptx
@@ -15,9 +15,16 @@
   <p:notesSz cx="9144000" cy="6858000"/>
   <p:embeddedFontLst>
     <p:embeddedFont>
-      <p:font typeface="Roboto Slab" pitchFamily="2" charset="0"/>
+      <p:font typeface="Calibri" panose="020F0502020204030204" pitchFamily="34" charset="0"/>
       <p:regular r:id="rId5"/>
       <p:bold r:id="rId6"/>
+      <p:italic r:id="rId7"/>
+      <p:boldItalic r:id="rId8"/>
+    </p:embeddedFont>
+    <p:embeddedFont>
+      <p:font typeface="Roboto Slab" panose="020B0604020202020204" charset="0"/>
+      <p:regular r:id="rId9"/>
+      <p:bold r:id="rId10"/>
     </p:embeddedFont>
   </p:embeddedFontLst>
   <p:defaultTextStyle>
@@ -254,7 +261,7 @@
       <p15:sldGuideLst xmlns:p15="http://schemas.microsoft.com/office/powerpoint/2012/main"/>
     </p:ext>
     <p:ext uri="GoogleSlidesCustomDataVersion2">
-      <go:slidesCustomData xmlns:go="http://customooxmlschemas.google.com/" xmlns:ahyp="http://schemas.microsoft.com/office/drawing/2018/hyperlinkcolor" xmlns:p15="http://schemas.microsoft.com/office/powerpoint/2012/main" xmlns:p14="http://schemas.microsoft.com/office/powerpoint/2010/main" xmlns:com="http://schemas.openxmlformats.org/drawingml/2006/compatibility" xmlns:pvml="urn:schemas-microsoft-com:office:powerpoint" xmlns:v="urn:schemas-microsoft-com:vml" xmlns:o="urn:schemas-microsoft-com:office:office" xmlns:dgm="http://schemas.openxmlformats.org/drawingml/2006/diagram" xmlns:c="http://schemas.openxmlformats.org/drawingml/2006/chart" xmlns:mv="urn:schemas-microsoft-com:mac:vml" xmlns:mc="http://schemas.openxmlformats.org/markup-compatibility/2006" xmlns="" r:id="rId9" roundtripDataSignature="AMtx7miNt8MGIBSDZ5vj/D6RygW99Z6vqA=="/>
+      <go:slidesCustomData xmlns="" xmlns:mc="http://schemas.openxmlformats.org/markup-compatibility/2006" xmlns:mv="urn:schemas-microsoft-com:mac:vml" xmlns:c="http://schemas.openxmlformats.org/drawingml/2006/chart" xmlns:dgm="http://schemas.openxmlformats.org/drawingml/2006/diagram" xmlns:o="urn:schemas-microsoft-com:office:office" xmlns:v="urn:schemas-microsoft-com:vml" xmlns:pvml="urn:schemas-microsoft-com:office:powerpoint" xmlns:com="http://schemas.openxmlformats.org/drawingml/2006/compatibility" xmlns:p14="http://schemas.microsoft.com/office/powerpoint/2010/main" xmlns:p15="http://schemas.microsoft.com/office/powerpoint/2012/main" xmlns:ahyp="http://schemas.microsoft.com/office/drawing/2018/hyperlinkcolor" xmlns:go="http://customooxmlschemas.google.com/" r:id="rId11" roundtripDataSignature="AMtx7miNt8MGIBSDZ5vj/D6RygW99Z6vqA=="/>
     </p:ext>
   </p:extLst>
 </p:presentation>
@@ -10340,6 +10347,42 @@
           <a:chExt cx="0" cy="0"/>
         </a:xfrm>
       </p:grpSpPr>
+      <p:cxnSp>
+        <p:nvCxnSpPr>
+          <p:cNvPr id="81" name="Google Shape;123;g2b6ec6cbb0c_0_0">
+            <a:extLst>
+              <a:ext uri="{FF2B5EF4-FFF2-40B4-BE49-F238E27FC236}">
+                <a16:creationId xmlns:a16="http://schemas.microsoft.com/office/drawing/2014/main" id="{77195C70-1A5E-402A-9EC2-4EE5DCB333DA}"/>
+              </a:ext>
+            </a:extLst>
+          </p:cNvPr>
+          <p:cNvCxnSpPr>
+            <a:cxnSpLocks/>
+            <a:stCxn id="189" idx="0"/>
+            <a:endCxn id="52" idx="2"/>
+          </p:cNvCxnSpPr>
+          <p:nvPr/>
+        </p:nvCxnSpPr>
+        <p:spPr>
+          <a:xfrm flipV="1">
+            <a:off x="1943580" y="3089353"/>
+            <a:ext cx="10266" cy="1566963"/>
+          </a:xfrm>
+          <a:prstGeom prst="straightConnector1">
+            <a:avLst/>
+          </a:prstGeom>
+          <a:noFill/>
+          <a:ln w="19050" cap="flat" cmpd="sng">
+            <a:solidFill>
+              <a:srgbClr val="343434"/>
+            </a:solidFill>
+            <a:prstDash val="solid"/>
+            <a:miter lim="800000"/>
+            <a:headEnd type="none" w="sm" len="sm"/>
+            <a:tailEnd type="triangle" w="med" len="med"/>
+          </a:ln>
+        </p:spPr>
+      </p:cxnSp>
       <p:sp>
         <p:nvSpPr>
           <p:cNvPr id="9" name="Rectangle 8">
@@ -10569,7 +10612,7 @@
         </p:nvSpPr>
         <p:spPr>
           <a:xfrm>
-            <a:off x="5669093" y="2485323"/>
+            <a:off x="5669093" y="2584567"/>
             <a:ext cx="3713872" cy="465387"/>
           </a:xfrm>
           <a:prstGeom prst="rect">
@@ -10633,7 +10676,7 @@
         <p:spPr>
           <a:xfrm>
             <a:off x="7517924" y="1862991"/>
-            <a:ext cx="8105" cy="622332"/>
+            <a:ext cx="8105" cy="721576"/>
           </a:xfrm>
           <a:prstGeom prst="straightConnector1">
             <a:avLst/>
@@ -10762,8 +10805,8 @@
         </p:nvCxnSpPr>
         <p:spPr>
           <a:xfrm>
-            <a:off x="7526029" y="2950710"/>
-            <a:ext cx="447536" cy="482976"/>
+            <a:off x="7526029" y="3049954"/>
+            <a:ext cx="447536" cy="383732"/>
           </a:xfrm>
           <a:prstGeom prst="straightConnector1">
             <a:avLst/>
@@ -10948,124 +10991,6 @@
               <a:srgbClr val="343434"/>
             </a:solidFill>
             <a:prstDash val="solid"/>
-            <a:miter lim="800000"/>
-            <a:headEnd type="none" w="sm" len="sm"/>
-            <a:tailEnd type="triangle" w="med" len="med"/>
-          </a:ln>
-        </p:spPr>
-      </p:cxnSp>
-      <p:cxnSp>
-        <p:nvCxnSpPr>
-          <p:cNvPr id="55" name="Google Shape;123;g2b6ec6cbb0c_0_0">
-            <a:extLst>
-              <a:ext uri="{FF2B5EF4-FFF2-40B4-BE49-F238E27FC236}">
-                <a16:creationId xmlns:a16="http://schemas.microsoft.com/office/drawing/2014/main" id="{24A5D0F7-4A99-0206-E0E7-10B082DC2BAD}"/>
-              </a:ext>
-            </a:extLst>
-          </p:cNvPr>
-          <p:cNvCxnSpPr>
-            <a:cxnSpLocks/>
-            <a:stCxn id="189" idx="0"/>
-            <a:endCxn id="52" idx="2"/>
-          </p:cNvCxnSpPr>
-          <p:nvPr/>
-        </p:nvCxnSpPr>
-        <p:spPr>
-          <a:xfrm flipV="1">
-            <a:off x="1943580" y="3089353"/>
-            <a:ext cx="10266" cy="1566963"/>
-          </a:xfrm>
-          <a:prstGeom prst="straightConnector1">
-            <a:avLst/>
-          </a:prstGeom>
-          <a:noFill/>
-          <a:ln w="19050" cap="flat" cmpd="sng">
-            <a:solidFill>
-              <a:srgbClr val="FF0000"/>
-            </a:solidFill>
-            <a:prstDash val="dash"/>
-            <a:miter lim="800000"/>
-            <a:headEnd type="none" w="sm" len="sm"/>
-            <a:tailEnd type="triangle" w="med" len="med"/>
-          </a:ln>
-        </p:spPr>
-      </p:cxnSp>
-      <p:cxnSp>
-        <p:nvCxnSpPr>
-          <p:cNvPr id="83" name="Straight Arrow Connector 82">
-            <a:extLst>
-              <a:ext uri="{FF2B5EF4-FFF2-40B4-BE49-F238E27FC236}">
-                <a16:creationId xmlns:a16="http://schemas.microsoft.com/office/drawing/2014/main" id="{9CD2F376-3B18-D32D-1A84-718E714D2943}"/>
-              </a:ext>
-            </a:extLst>
-          </p:cNvPr>
-          <p:cNvCxnSpPr>
-            <a:cxnSpLocks/>
-          </p:cNvCxnSpPr>
-          <p:nvPr/>
-        </p:nvCxnSpPr>
-        <p:spPr>
-          <a:xfrm>
-            <a:off x="2778661" y="2914366"/>
-            <a:ext cx="2880548" cy="3256"/>
-          </a:xfrm>
-          <a:prstGeom prst="straightConnector1">
-            <a:avLst/>
-          </a:prstGeom>
-          <a:ln w="19050">
-            <a:solidFill>
-              <a:srgbClr val="FF0000"/>
-            </a:solidFill>
-            <a:prstDash val="sysDash"/>
-            <a:headEnd type="triangle"/>
-            <a:tailEnd type="triangle"/>
-          </a:ln>
-        </p:spPr>
-        <p:style>
-          <a:lnRef idx="1">
-            <a:schemeClr val="accent1"/>
-          </a:lnRef>
-          <a:fillRef idx="0">
-            <a:schemeClr val="accent1"/>
-          </a:fillRef>
-          <a:effectRef idx="0">
-            <a:schemeClr val="accent1"/>
-          </a:effectRef>
-          <a:fontRef idx="minor">
-            <a:schemeClr val="tx1"/>
-          </a:fontRef>
-        </p:style>
-      </p:cxnSp>
-      <p:cxnSp>
-        <p:nvCxnSpPr>
-          <p:cNvPr id="85" name="Google Shape;123;g2b6ec6cbb0c_0_0">
-            <a:extLst>
-              <a:ext uri="{FF2B5EF4-FFF2-40B4-BE49-F238E27FC236}">
-                <a16:creationId xmlns:a16="http://schemas.microsoft.com/office/drawing/2014/main" id="{0A237E13-DC33-FC2B-C17A-C276370A7DC0}"/>
-              </a:ext>
-            </a:extLst>
-          </p:cNvPr>
-          <p:cNvCxnSpPr>
-            <a:cxnSpLocks/>
-            <a:stCxn id="79" idx="2"/>
-            <a:endCxn id="102" idx="0"/>
-          </p:cNvCxnSpPr>
-          <p:nvPr/>
-        </p:nvCxnSpPr>
-        <p:spPr>
-          <a:xfrm flipH="1">
-            <a:off x="4154299" y="3181616"/>
-            <a:ext cx="69569" cy="194912"/>
-          </a:xfrm>
-          <a:prstGeom prst="straightConnector1">
-            <a:avLst/>
-          </a:prstGeom>
-          <a:noFill/>
-          <a:ln w="19050" cap="flat" cmpd="sng">
-            <a:solidFill>
-              <a:srgbClr val="FF0000"/>
-            </a:solidFill>
-            <a:prstDash val="dash"/>
             <a:miter lim="800000"/>
             <a:headEnd type="none" w="sm" len="sm"/>
             <a:tailEnd type="triangle" w="med" len="med"/>
@@ -11575,62 +11500,6 @@
               <a:cs typeface="Roboto Slab"/>
               <a:sym typeface="Roboto Slab"/>
             </a:endParaRPr>
-          </a:p>
-        </p:txBody>
-      </p:sp>
-      <p:sp>
-        <p:nvSpPr>
-          <p:cNvPr id="8" name="Google Shape;140;g2b6ec6cbb0c_0_0">
-            <a:extLst>
-              <a:ext uri="{FF2B5EF4-FFF2-40B4-BE49-F238E27FC236}">
-                <a16:creationId xmlns:a16="http://schemas.microsoft.com/office/drawing/2014/main" id="{1F5135BC-9023-455D-B13C-BECFE7F68B2D}"/>
-              </a:ext>
-            </a:extLst>
-          </p:cNvPr>
-          <p:cNvSpPr/>
-          <p:nvPr/>
-        </p:nvSpPr>
-        <p:spPr>
-          <a:xfrm>
-            <a:off x="3150788" y="4696871"/>
-            <a:ext cx="2019194" cy="314821"/>
-          </a:xfrm>
-          <a:prstGeom prst="rect">
-            <a:avLst/>
-          </a:prstGeom>
-          <a:solidFill>
-            <a:schemeClr val="lt1"/>
-          </a:solidFill>
-          <a:ln>
-            <a:noFill/>
-          </a:ln>
-          <a:effectLst>
-            <a:outerShdw blurRad="57150" dist="19050" dir="5400000" algn="bl" rotWithShape="0">
-              <a:srgbClr val="000000">
-                <a:alpha val="50000"/>
-              </a:srgbClr>
-            </a:outerShdw>
-          </a:effectLst>
-        </p:spPr>
-        <p:txBody>
-          <a:bodyPr spcFirstLastPara="1" wrap="square" lIns="91425" tIns="45700" rIns="91425" bIns="45700" anchor="ctr" anchorCtr="0">
-            <a:noAutofit/>
-          </a:bodyPr>
-          <a:lstStyle/>
-          <a:p>
-            <a:pPr algn="ctr"/>
-            <a:r>
-              <a:rPr lang="en-GB" sz="1100" b="1" i="1" dirty="0">
-                <a:solidFill>
-                  <a:srgbClr val="FF0000"/>
-                </a:solidFill>
-                <a:latin typeface="Roboto Slab"/>
-                <a:ea typeface="Roboto Slab"/>
-                <a:cs typeface="Roboto Slab"/>
-                <a:sym typeface="Roboto Slab"/>
-              </a:rPr>
-              <a:t>Filtering species by user</a:t>
-            </a:r>
           </a:p>
         </p:txBody>
       </p:sp>
@@ -11961,8 +11830,8 @@
         </p:nvCxnSpPr>
         <p:spPr>
           <a:xfrm rot="16200000" flipH="1">
-            <a:off x="4149004" y="1197928"/>
-            <a:ext cx="1753790" cy="1286387"/>
+            <a:off x="4099382" y="1247550"/>
+            <a:ext cx="1853034" cy="1286387"/>
           </a:xfrm>
           <a:prstGeom prst="bentConnector2">
             <a:avLst/>
@@ -12198,42 +12067,6 @@
               <a:srgbClr val="343434"/>
             </a:solidFill>
             <a:prstDash val="solid"/>
-            <a:miter lim="800000"/>
-            <a:headEnd type="none" w="sm" len="sm"/>
-            <a:tailEnd type="triangle" w="med" len="med"/>
-          </a:ln>
-        </p:spPr>
-      </p:cxnSp>
-      <p:cxnSp>
-        <p:nvCxnSpPr>
-          <p:cNvPr id="217" name="Google Shape;123;g2b6ec6cbb0c_0_0">
-            <a:extLst>
-              <a:ext uri="{FF2B5EF4-FFF2-40B4-BE49-F238E27FC236}">
-                <a16:creationId xmlns:a16="http://schemas.microsoft.com/office/drawing/2014/main" id="{EE840A95-E27A-6DDF-AD16-4A307398CA13}"/>
-              </a:ext>
-            </a:extLst>
-          </p:cNvPr>
-          <p:cNvCxnSpPr>
-            <a:cxnSpLocks/>
-            <a:stCxn id="103" idx="2"/>
-            <a:endCxn id="8" idx="0"/>
-          </p:cNvCxnSpPr>
-          <p:nvPr/>
-        </p:nvCxnSpPr>
-        <p:spPr>
-          <a:xfrm>
-            <a:off x="4154298" y="4492375"/>
-            <a:ext cx="6087" cy="204496"/>
-          </a:xfrm>
-          <a:prstGeom prst="straightConnector1">
-            <a:avLst/>
-          </a:prstGeom>
-          <a:noFill/>
-          <a:ln w="19050" cap="flat" cmpd="sng">
-            <a:solidFill>
-              <a:srgbClr val="FF0000"/>
-            </a:solidFill>
-            <a:prstDash val="dash"/>
             <a:miter lim="800000"/>
             <a:headEnd type="none" w="sm" len="sm"/>
             <a:tailEnd type="triangle" w="med" len="med"/>
@@ -12463,15 +12296,15 @@
           </p:cNvPr>
           <p:cNvCxnSpPr>
             <a:cxnSpLocks/>
-            <a:stCxn id="8" idx="2"/>
+            <a:stCxn id="103" idx="2"/>
             <a:endCxn id="107" idx="0"/>
           </p:cNvCxnSpPr>
           <p:nvPr/>
         </p:nvCxnSpPr>
         <p:spPr>
-          <a:xfrm flipH="1">
-            <a:off x="4154298" y="5011692"/>
-            <a:ext cx="6087" cy="158564"/>
+          <a:xfrm>
+            <a:off x="4154298" y="4492375"/>
+            <a:ext cx="0" cy="677881"/>
           </a:xfrm>
           <a:prstGeom prst="straightConnector1">
             <a:avLst/>
@@ -12807,7 +12640,7 @@
                 <a:cs typeface="Roboto Slab"/>
                 <a:sym typeface="Roboto Slab"/>
               </a:rPr>
-              <a:t>SHORT VERSION, 25/09/2024</a:t>
+              <a:t>SHORT VERSION, 15/08/2025</a:t>
             </a:r>
           </a:p>
         </p:txBody>
@@ -12826,8 +12659,8 @@
         </p:nvSpPr>
         <p:spPr>
           <a:xfrm>
-            <a:off x="3121054" y="2658396"/>
-            <a:ext cx="2205628" cy="523220"/>
+            <a:off x="3116978" y="2734144"/>
+            <a:ext cx="2205628" cy="307777"/>
           </a:xfrm>
           <a:prstGeom prst="rect">
             <a:avLst/>
@@ -12856,21 +12689,11 @@
               </a:rPr>
               <a:t>sciName</a:t>
             </a:r>
-            <a:br>
-              <a:rPr lang="en-GB" b="1" dirty="0">
-                <a:solidFill>
-                  <a:srgbClr val="FF0000"/>
-                </a:solidFill>
-              </a:rPr>
-            </a:br>
-            <a:r>
-              <a:rPr lang="en-GB" b="1" dirty="0">
-                <a:solidFill>
-                  <a:srgbClr val="FF0000"/>
-                </a:solidFill>
-              </a:rPr>
-              <a:t>or Mapping by ID</a:t>
-            </a:r>
+            <a:endParaRPr lang="en-GB" b="1" dirty="0">
+              <a:solidFill>
+                <a:srgbClr val="FF0000"/>
+              </a:solidFill>
+            </a:endParaRPr>
           </a:p>
         </p:txBody>
       </p:sp>
@@ -12952,7 +12775,7 @@
         </p:nvSpPr>
         <p:spPr>
           <a:xfrm>
-            <a:off x="9221813" y="2578371"/>
+            <a:off x="9246327" y="2672518"/>
             <a:ext cx="342068" cy="316699"/>
           </a:xfrm>
           <a:prstGeom prst="rect">
@@ -12998,70 +12821,6 @@
                 </a:solidFill>
               </a:rPr>
               <a:t>2</a:t>
-            </a:r>
-          </a:p>
-        </p:txBody>
-      </p:sp>
-      <p:sp>
-        <p:nvSpPr>
-          <p:cNvPr id="90" name="Rectangle 89">
-            <a:extLst>
-              <a:ext uri="{FF2B5EF4-FFF2-40B4-BE49-F238E27FC236}">
-                <a16:creationId xmlns:a16="http://schemas.microsoft.com/office/drawing/2014/main" id="{AD16B7A4-0DD3-FFBE-1591-8E25AC96A048}"/>
-              </a:ext>
-            </a:extLst>
-          </p:cNvPr>
-          <p:cNvSpPr/>
-          <p:nvPr/>
-        </p:nvSpPr>
-        <p:spPr>
-          <a:xfrm>
-            <a:off x="5051432" y="2783775"/>
-            <a:ext cx="342068" cy="316699"/>
-          </a:xfrm>
-          <a:prstGeom prst="rect">
-            <a:avLst/>
-          </a:prstGeom>
-          <a:solidFill>
-            <a:schemeClr val="accent4">
-              <a:lumMod val="40000"/>
-              <a:lumOff val="60000"/>
-            </a:schemeClr>
-          </a:solidFill>
-          <a:ln w="12700">
-            <a:solidFill>
-              <a:schemeClr val="tx1"/>
-            </a:solidFill>
-          </a:ln>
-        </p:spPr>
-        <p:style>
-          <a:lnRef idx="2">
-            <a:schemeClr val="accent1">
-              <a:shade val="15000"/>
-            </a:schemeClr>
-          </a:lnRef>
-          <a:fillRef idx="1">
-            <a:schemeClr val="accent1"/>
-          </a:fillRef>
-          <a:effectRef idx="0">
-            <a:schemeClr val="accent1"/>
-          </a:effectRef>
-          <a:fontRef idx="minor">
-            <a:schemeClr val="lt1"/>
-          </a:fontRef>
-        </p:style>
-        <p:txBody>
-          <a:bodyPr rtlCol="0" anchor="ctr"/>
-          <a:lstStyle/>
-          <a:p>
-            <a:pPr algn="ctr"/>
-            <a:r>
-              <a:rPr lang="en-GB" b="1" dirty="0">
-                <a:solidFill>
-                  <a:schemeClr val="tx1"/>
-                </a:solidFill>
-              </a:rPr>
-              <a:t>3</a:t>
             </a:r>
           </a:p>
         </p:txBody>
@@ -13572,6 +13331,142 @@
           </a:p>
         </p:txBody>
       </p:sp>
+      <p:cxnSp>
+        <p:nvCxnSpPr>
+          <p:cNvPr id="63" name="Google Shape;123;g2b6ec6cbb0c_0_0">
+            <a:extLst>
+              <a:ext uri="{FF2B5EF4-FFF2-40B4-BE49-F238E27FC236}">
+                <a16:creationId xmlns:a16="http://schemas.microsoft.com/office/drawing/2014/main" id="{D69121F6-5598-4CD3-B996-B9E08D75241C}"/>
+              </a:ext>
+            </a:extLst>
+          </p:cNvPr>
+          <p:cNvCxnSpPr>
+            <a:cxnSpLocks/>
+            <a:stCxn id="121" idx="1"/>
+            <a:endCxn id="52" idx="3"/>
+          </p:cNvCxnSpPr>
+          <p:nvPr/>
+        </p:nvCxnSpPr>
+        <p:spPr>
+          <a:xfrm flipH="1">
+            <a:off x="2768777" y="2817261"/>
+            <a:ext cx="2900316" cy="569"/>
+          </a:xfrm>
+          <a:prstGeom prst="straightConnector1">
+            <a:avLst/>
+          </a:prstGeom>
+          <a:noFill/>
+          <a:ln w="19050" cap="flat" cmpd="sng">
+            <a:solidFill>
+              <a:srgbClr val="343434"/>
+            </a:solidFill>
+            <a:prstDash val="solid"/>
+            <a:miter lim="800000"/>
+            <a:headEnd type="none" w="sm" len="sm"/>
+            <a:tailEnd type="triangle" w="med" len="med"/>
+          </a:ln>
+        </p:spPr>
+      </p:cxnSp>
+      <p:sp>
+        <p:nvSpPr>
+          <p:cNvPr id="90" name="Rectangle 89">
+            <a:extLst>
+              <a:ext uri="{FF2B5EF4-FFF2-40B4-BE49-F238E27FC236}">
+                <a16:creationId xmlns:a16="http://schemas.microsoft.com/office/drawing/2014/main" id="{AD16B7A4-0DD3-FFBE-1591-8E25AC96A048}"/>
+              </a:ext>
+            </a:extLst>
+          </p:cNvPr>
+          <p:cNvSpPr/>
+          <p:nvPr/>
+        </p:nvSpPr>
+        <p:spPr>
+          <a:xfrm>
+            <a:off x="5051432" y="2705151"/>
+            <a:ext cx="342068" cy="316699"/>
+          </a:xfrm>
+          <a:prstGeom prst="rect">
+            <a:avLst/>
+          </a:prstGeom>
+          <a:solidFill>
+            <a:schemeClr val="accent4">
+              <a:lumMod val="40000"/>
+              <a:lumOff val="60000"/>
+            </a:schemeClr>
+          </a:solidFill>
+          <a:ln w="12700">
+            <a:solidFill>
+              <a:schemeClr val="tx1"/>
+            </a:solidFill>
+          </a:ln>
+        </p:spPr>
+        <p:style>
+          <a:lnRef idx="2">
+            <a:schemeClr val="accent1">
+              <a:shade val="15000"/>
+            </a:schemeClr>
+          </a:lnRef>
+          <a:fillRef idx="1">
+            <a:schemeClr val="accent1"/>
+          </a:fillRef>
+          <a:effectRef idx="0">
+            <a:schemeClr val="accent1"/>
+          </a:effectRef>
+          <a:fontRef idx="minor">
+            <a:schemeClr val="lt1"/>
+          </a:fontRef>
+        </p:style>
+        <p:txBody>
+          <a:bodyPr rtlCol="0" anchor="ctr"/>
+          <a:lstStyle/>
+          <a:p>
+            <a:pPr algn="ctr"/>
+            <a:r>
+              <a:rPr lang="en-GB" b="1" dirty="0">
+                <a:solidFill>
+                  <a:schemeClr val="tx1"/>
+                </a:solidFill>
+              </a:rPr>
+              <a:t>3</a:t>
+            </a:r>
+          </a:p>
+        </p:txBody>
+      </p:sp>
+      <p:cxnSp>
+        <p:nvCxnSpPr>
+          <p:cNvPr id="78" name="Google Shape;123;g2b6ec6cbb0c_0_0">
+            <a:extLst>
+              <a:ext uri="{FF2B5EF4-FFF2-40B4-BE49-F238E27FC236}">
+                <a16:creationId xmlns:a16="http://schemas.microsoft.com/office/drawing/2014/main" id="{42FFC9A8-847B-4BB9-98CF-3CF65311BB1A}"/>
+              </a:ext>
+            </a:extLst>
+          </p:cNvPr>
+          <p:cNvCxnSpPr>
+            <a:cxnSpLocks/>
+            <a:stCxn id="79" idx="2"/>
+            <a:endCxn id="102" idx="0"/>
+          </p:cNvCxnSpPr>
+          <p:nvPr/>
+        </p:nvCxnSpPr>
+        <p:spPr>
+          <a:xfrm flipH="1">
+            <a:off x="4154299" y="3041921"/>
+            <a:ext cx="65493" cy="334607"/>
+          </a:xfrm>
+          <a:prstGeom prst="straightConnector1">
+            <a:avLst/>
+          </a:prstGeom>
+          <a:noFill/>
+          <a:ln w="19050" cap="flat" cmpd="sng">
+            <a:solidFill>
+              <a:srgbClr val="343434"/>
+            </a:solidFill>
+            <a:prstDash val="solid"/>
+            <a:miter lim="800000"/>
+            <a:headEnd type="none" w="sm" len="sm"/>
+            <a:tailEnd type="triangle" w="med" len="med"/>
+          </a:ln>
+        </p:spPr>
+      </p:cxnSp>
     </p:spTree>
     <p:extLst>
       <p:ext uri="{BB962C8B-B14F-4D97-AF65-F5344CB8AC3E}">
